--- a/Chapter Two 1447/CSC 621 Research Methods/Lectures/Ch-11-PPTaccessible.pptx
+++ b/Chapter Two 1447/CSC 621 Research Methods/Lectures/Ch-11-PPTaccessible.pptx
@@ -2,50 +2,50 @@
 <file path=ppt/presentation.xml><?xml version="1.0" encoding="utf-8"?>
 <p:presentation xmlns:a="http://schemas.openxmlformats.org/drawingml/2006/main" xmlns:r="http://schemas.openxmlformats.org/officeDocument/2006/relationships" xmlns:p="http://schemas.openxmlformats.org/presentationml/2006/main" strictFirstAndLastChars="0" saveSubsetFonts="1" autoCompressPictures="0">
   <p:sldMasterIdLst>
-    <p:sldMasterId id="2147483659" r:id="rId1"/>
-    <p:sldMasterId id="2147483660" r:id="rId2"/>
+    <p:sldMasterId id="2147483659" r:id="rId4"/>
+    <p:sldMasterId id="2147483660" r:id="rId5"/>
   </p:sldMasterIdLst>
   <p:notesMasterIdLst>
-    <p:notesMasterId r:id="rId37"/>
+    <p:notesMasterId r:id="rId40"/>
   </p:notesMasterIdLst>
   <p:handoutMasterIdLst>
-    <p:handoutMasterId r:id="rId38"/>
+    <p:handoutMasterId r:id="rId41"/>
   </p:handoutMasterIdLst>
   <p:sldIdLst>
-    <p:sldId id="340" r:id="rId3"/>
-    <p:sldId id="307" r:id="rId4"/>
-    <p:sldId id="308" r:id="rId5"/>
-    <p:sldId id="309" r:id="rId6"/>
-    <p:sldId id="310" r:id="rId7"/>
-    <p:sldId id="339" r:id="rId8"/>
-    <p:sldId id="312" r:id="rId9"/>
-    <p:sldId id="313" r:id="rId10"/>
-    <p:sldId id="314" r:id="rId11"/>
-    <p:sldId id="315" r:id="rId12"/>
-    <p:sldId id="316" r:id="rId13"/>
-    <p:sldId id="317" r:id="rId14"/>
-    <p:sldId id="318" r:id="rId15"/>
-    <p:sldId id="319" r:id="rId16"/>
-    <p:sldId id="320" r:id="rId17"/>
-    <p:sldId id="321" r:id="rId18"/>
-    <p:sldId id="322" r:id="rId19"/>
-    <p:sldId id="323" r:id="rId20"/>
-    <p:sldId id="324" r:id="rId21"/>
-    <p:sldId id="325" r:id="rId22"/>
-    <p:sldId id="326" r:id="rId23"/>
-    <p:sldId id="327" r:id="rId24"/>
-    <p:sldId id="328" r:id="rId25"/>
-    <p:sldId id="329" r:id="rId26"/>
-    <p:sldId id="330" r:id="rId27"/>
-    <p:sldId id="331" r:id="rId28"/>
-    <p:sldId id="332" r:id="rId29"/>
-    <p:sldId id="333" r:id="rId30"/>
-    <p:sldId id="342" r:id="rId31"/>
-    <p:sldId id="335" r:id="rId32"/>
-    <p:sldId id="336" r:id="rId33"/>
-    <p:sldId id="337" r:id="rId34"/>
-    <p:sldId id="338" r:id="rId35"/>
-    <p:sldId id="341" r:id="rId36"/>
+    <p:sldId id="340" r:id="rId6"/>
+    <p:sldId id="307" r:id="rId7"/>
+    <p:sldId id="308" r:id="rId8"/>
+    <p:sldId id="309" r:id="rId9"/>
+    <p:sldId id="310" r:id="rId10"/>
+    <p:sldId id="339" r:id="rId11"/>
+    <p:sldId id="312" r:id="rId12"/>
+    <p:sldId id="313" r:id="rId13"/>
+    <p:sldId id="314" r:id="rId14"/>
+    <p:sldId id="315" r:id="rId15"/>
+    <p:sldId id="316" r:id="rId16"/>
+    <p:sldId id="317" r:id="rId17"/>
+    <p:sldId id="318" r:id="rId18"/>
+    <p:sldId id="319" r:id="rId19"/>
+    <p:sldId id="320" r:id="rId20"/>
+    <p:sldId id="321" r:id="rId21"/>
+    <p:sldId id="322" r:id="rId22"/>
+    <p:sldId id="323" r:id="rId23"/>
+    <p:sldId id="324" r:id="rId24"/>
+    <p:sldId id="325" r:id="rId25"/>
+    <p:sldId id="326" r:id="rId26"/>
+    <p:sldId id="327" r:id="rId27"/>
+    <p:sldId id="328" r:id="rId28"/>
+    <p:sldId id="329" r:id="rId29"/>
+    <p:sldId id="330" r:id="rId30"/>
+    <p:sldId id="331" r:id="rId31"/>
+    <p:sldId id="332" r:id="rId32"/>
+    <p:sldId id="333" r:id="rId33"/>
+    <p:sldId id="342" r:id="rId34"/>
+    <p:sldId id="335" r:id="rId35"/>
+    <p:sldId id="336" r:id="rId36"/>
+    <p:sldId id="337" r:id="rId37"/>
+    <p:sldId id="338" r:id="rId38"/>
+    <p:sldId id="341" r:id="rId39"/>
   </p:sldIdLst>
   <p:sldSz cx="9144000" cy="6858000" type="screen4x3"/>
   <p:notesSz cx="6858000" cy="9144000"/>
@@ -393,7 +393,7 @@
           <a:p>
             <a:fld id="{2885CB01-6679-D646-ACB3-8B04B786C15F}" type="datetimeFigureOut">
               <a:rPr lang="en-US" smtClean="0"/>
-              <a:t>10/22/2021</a:t>
+              <a:t>5/31/2026</a:t>
             </a:fld>
             <a:endParaRPr lang="en-US"/>
           </a:p>
@@ -19327,12 +19327,12 @@
           <a:graphicData uri="http://schemas.openxmlformats.org/presentationml/2006/ole">
             <mc:AlternateContent xmlns:mc="http://schemas.openxmlformats.org/markup-compatibility/2006">
               <mc:Choice xmlns:v="urn:schemas-microsoft-com:vml" Requires="v">
-                <p:oleObj spid="_x0000_s2072" name="Equation" r:id="rId3" imgW="101520" imgH="164880" progId="Equation.DSMT4">
+                <p:oleObj name="Equation" r:id="rId2" imgW="101520" imgH="164880" progId="Equation.DSMT4">
                   <p:embed/>
                 </p:oleObj>
               </mc:Choice>
               <mc:Fallback>
-                <p:oleObj name="Equation" r:id="rId3" imgW="101520" imgH="164880" progId="Equation.DSMT4">
+                <p:oleObj name="Equation" r:id="rId2" imgW="101520" imgH="164880" progId="Equation.DSMT4">
                   <p:embed/>
                   <p:pic>
                     <p:nvPicPr>
@@ -19347,7 +19347,7 @@
                       <p:nvPr/>
                     </p:nvPicPr>
                     <p:blipFill>
-                      <a:blip r:embed="rId4"/>
+                      <a:blip r:embed="rId3"/>
                       <a:stretch>
                         <a:fillRect/>
                       </a:stretch>
@@ -19642,12 +19642,12 @@
           <a:graphicData uri="http://schemas.openxmlformats.org/presentationml/2006/ole">
             <mc:AlternateContent xmlns:mc="http://schemas.openxmlformats.org/markup-compatibility/2006">
               <mc:Choice xmlns:v="urn:schemas-microsoft-com:vml" Requires="v">
-                <p:oleObj spid="_x0000_s3096" name="Equation" r:id="rId3" imgW="152280" imgH="164880" progId="Equation.DSMT4">
+                <p:oleObj name="Equation" r:id="rId2" imgW="152280" imgH="164880" progId="Equation.DSMT4">
                   <p:embed/>
                 </p:oleObj>
               </mc:Choice>
               <mc:Fallback>
-                <p:oleObj name="Equation" r:id="rId3" imgW="152280" imgH="164880" progId="Equation.DSMT4">
+                <p:oleObj name="Equation" r:id="rId2" imgW="152280" imgH="164880" progId="Equation.DSMT4">
                   <p:embed/>
                   <p:pic>
                     <p:nvPicPr>
@@ -19662,7 +19662,7 @@
                       <p:nvPr/>
                     </p:nvPicPr>
                     <p:blipFill>
-                      <a:blip r:embed="rId4"/>
+                      <a:blip r:embed="rId3"/>
                       <a:stretch>
                         <a:fillRect/>
                       </a:stretch>
@@ -19975,8 +19975,8 @@
         </p:nvSpPr>
         <p:spPr>
           <a:xfrm>
-            <a:off x="457200" y="246124"/>
-            <a:ext cx="8229600" cy="1144347"/>
+            <a:off x="457200" y="1046343"/>
+            <a:ext cx="8229600" cy="344128"/>
           </a:xfrm>
         </p:spPr>
         <p:txBody>
@@ -19992,7 +19992,7 @@
               <a:buClrTx/>
             </a:pPr>
             <a:r>
-              <a:rPr lang="en-US" sz="3600" kern="1200" dirty="0">
+              <a:rPr lang="en-US" sz="2000" kern="1200" dirty="0">
                 <a:latin typeface="+mj-lt"/>
                 <a:ea typeface="+mj-ea"/>
                 <a:cs typeface="Times New Roman" panose="02020603050405020304" pitchFamily="18" charset="0"/>
@@ -21199,8 +21199,8 @@
         </p:nvSpPr>
         <p:spPr>
           <a:xfrm>
-            <a:off x="457200" y="246123"/>
-            <a:ext cx="8229600" cy="1144347"/>
+            <a:off x="457200" y="923231"/>
+            <a:ext cx="8229600" cy="467239"/>
           </a:xfrm>
         </p:spPr>
         <p:txBody>
@@ -21216,7 +21216,7 @@
               <a:buClrTx/>
             </a:pPr>
             <a:r>
-              <a:rPr lang="en-US" sz="3600" kern="1200" dirty="0">
+              <a:rPr lang="en-US" sz="2800" kern="1200" dirty="0">
                 <a:latin typeface="+mj-lt"/>
                 <a:ea typeface="+mj-ea"/>
                 <a:cs typeface="Times New Roman" panose="02020603050405020304" pitchFamily="18" charset="0"/>
@@ -21598,8 +21598,8 @@
         </p:nvSpPr>
         <p:spPr>
           <a:xfrm>
-            <a:off x="457200" y="246125"/>
-            <a:ext cx="8229600" cy="1144347"/>
+            <a:off x="457200" y="984789"/>
+            <a:ext cx="8229600" cy="405683"/>
           </a:xfrm>
         </p:spPr>
         <p:txBody>
@@ -21615,7 +21615,7 @@
               <a:buClrTx/>
             </a:pPr>
             <a:r>
-              <a:rPr lang="en-US" sz="3600" kern="1200">
+              <a:rPr lang="en-US" sz="2400" kern="1200" dirty="0">
                 <a:latin typeface="+mj-lt"/>
                 <a:ea typeface="+mj-ea"/>
                 <a:cs typeface="Times New Roman" panose="02020603050405020304" pitchFamily="18" charset="0"/>
@@ -21761,12 +21761,12 @@
           <a:graphicData uri="http://schemas.openxmlformats.org/presentationml/2006/ole">
             <mc:AlternateContent xmlns:mc="http://schemas.openxmlformats.org/markup-compatibility/2006">
               <mc:Choice xmlns:v="urn:schemas-microsoft-com:vml" Requires="v">
-                <p:oleObj spid="_x0000_s1070" name="Equation" r:id="rId3" imgW="266400" imgH="177480" progId="Equation.DSMT4">
+                <p:oleObj name="Equation" r:id="rId2" imgW="266400" imgH="177480" progId="Equation.DSMT4">
                   <p:embed/>
                 </p:oleObj>
               </mc:Choice>
               <mc:Fallback>
-                <p:oleObj name="Equation" r:id="rId3" imgW="266400" imgH="177480" progId="Equation.DSMT4">
+                <p:oleObj name="Equation" r:id="rId2" imgW="266400" imgH="177480" progId="Equation.DSMT4">
                   <p:embed/>
                   <p:pic>
                     <p:nvPicPr>
@@ -21775,7 +21775,7 @@
                       <p:nvPr/>
                     </p:nvPicPr>
                     <p:blipFill>
-                      <a:blip r:embed="rId4"/>
+                      <a:blip r:embed="rId3"/>
                       <a:stretch>
                         <a:fillRect/>
                       </a:stretch>
@@ -21863,12 +21863,12 @@
           <a:graphicData uri="http://schemas.openxmlformats.org/presentationml/2006/ole">
             <mc:AlternateContent xmlns:mc="http://schemas.openxmlformats.org/markup-compatibility/2006">
               <mc:Choice xmlns:v="urn:schemas-microsoft-com:vml" Requires="v">
-                <p:oleObj spid="_x0000_s1071" name="Equation" r:id="rId5" imgW="241200" imgH="203040" progId="Equation.DSMT4">
+                <p:oleObj name="Equation" r:id="rId4" imgW="241200" imgH="203040" progId="Equation.DSMT4">
                   <p:embed/>
                 </p:oleObj>
               </mc:Choice>
               <mc:Fallback>
-                <p:oleObj name="Equation" r:id="rId5" imgW="241200" imgH="203040" progId="Equation.DSMT4">
+                <p:oleObj name="Equation" r:id="rId4" imgW="241200" imgH="203040" progId="Equation.DSMT4">
                   <p:embed/>
                   <p:pic>
                     <p:nvPicPr>
@@ -21877,7 +21877,7 @@
                       <p:nvPr/>
                     </p:nvPicPr>
                     <p:blipFill>
-                      <a:blip r:embed="rId6"/>
+                      <a:blip r:embed="rId5"/>
                       <a:stretch>
                         <a:fillRect/>
                       </a:stretch>
@@ -23786,6 +23786,15 @@
 </file>
 
 <file path=customXml/item1.xml><?xml version="1.0" encoding="utf-8"?>
+<?mso-contentType ?>
+<FormTemplates xmlns="http://schemas.microsoft.com/sharepoint/v3/contenttype/forms">
+  <Display>DocumentLibraryForm</Display>
+  <Edit>DocumentLibraryForm</Edit>
+  <New>DocumentLibraryForm</New>
+</FormTemplates>
+</file>
+
+<file path=customXml/item2.xml><?xml version="1.0" encoding="utf-8"?>
 <ct:contentTypeSchema xmlns:ct="http://schemas.microsoft.com/office/2006/metadata/contentType" xmlns:ma="http://schemas.microsoft.com/office/2006/metadata/properties/metaAttributes" ct:_="" ma:_="" ma:contentTypeName="Document" ma:contentTypeID="0x01010086D90B95B22DD945BDFF45EB84A5E21C" ma:contentTypeVersion="12" ma:contentTypeDescription="Create a new document." ma:contentTypeScope="" ma:versionID="9ee3781bcb6633d132c89161492bb118">
   <xsd:schema xmlns:xsd="http://www.w3.org/2001/XMLSchema" xmlns:xs="http://www.w3.org/2001/XMLSchema" xmlns:p="http://schemas.microsoft.com/office/2006/metadata/properties" xmlns:ns2="7c1bd8dc-4e40-424f-a15f-9ffcd522197f" xmlns:ns3="6125ffc9-2c56-435e-8267-1393444907b2" targetNamespace="http://schemas.microsoft.com/office/2006/metadata/properties" ma:root="true" ma:fieldsID="d3e430f46b92204fb5a3381a429c4dbe" ns2:_="" ns3:_="">
     <xsd:import namespace="7c1bd8dc-4e40-424f-a15f-9ffcd522197f"/>
@@ -24002,15 +24011,6 @@
 </ct:contentTypeSchema>
 </file>
 
-<file path=customXml/item2.xml><?xml version="1.0" encoding="utf-8"?>
-<?mso-contentType ?>
-<FormTemplates xmlns="http://schemas.microsoft.com/sharepoint/v3/contenttype/forms">
-  <Display>DocumentLibraryForm</Display>
-  <Edit>DocumentLibraryForm</Edit>
-  <New>DocumentLibraryForm</New>
-</FormTemplates>
-</file>
-
 <file path=customXml/item3.xml><?xml version="1.0" encoding="utf-8"?>
 <p:properties xmlns:p="http://schemas.microsoft.com/office/2006/metadata/properties" xmlns:xsi="http://www.w3.org/2001/XMLSchema-instance" xmlns:pc="http://schemas.microsoft.com/office/infopath/2007/PartnerControls">
   <documentManagement/>
@@ -24018,13 +24018,37 @@
 </file>
 
 <file path=customXml/itemProps1.xml><?xml version="1.0" encoding="utf-8"?>
-<ds:datastoreItem xmlns:ds="http://schemas.openxmlformats.org/officeDocument/2006/customXml" ds:itemID="{905B2579-1531-44FB-B0C6-F10CD63E6B02}"/>
+<ds:datastoreItem xmlns:ds="http://schemas.openxmlformats.org/officeDocument/2006/customXml" ds:itemID="{1B8FCFB3-5884-4524-8C3E-739A11E7D419}">
+  <ds:schemaRefs>
+    <ds:schemaRef ds:uri="http://schemas.microsoft.com/sharepoint/v3/contenttype/forms"/>
+  </ds:schemaRefs>
+</ds:datastoreItem>
 </file>
 
 <file path=customXml/itemProps2.xml><?xml version="1.0" encoding="utf-8"?>
-<ds:datastoreItem xmlns:ds="http://schemas.openxmlformats.org/officeDocument/2006/customXml" ds:itemID="{1B8FCFB3-5884-4524-8C3E-739A11E7D419}"/>
+<ds:datastoreItem xmlns:ds="http://schemas.openxmlformats.org/officeDocument/2006/customXml" ds:itemID="{905B2579-1531-44FB-B0C6-F10CD63E6B02}">
+  <ds:schemaRefs>
+    <ds:schemaRef ds:uri="http://schemas.microsoft.com/office/2006/metadata/contentType"/>
+    <ds:schemaRef ds:uri="http://schemas.microsoft.com/office/2006/metadata/properties/metaAttributes"/>
+    <ds:schemaRef ds:uri="http://www.w3.org/2001/XMLSchema"/>
+    <ds:schemaRef ds:uri="http://schemas.microsoft.com/office/2006/metadata/properties"/>
+    <ds:schemaRef ds:uri="7c1bd8dc-4e40-424f-a15f-9ffcd522197f"/>
+    <ds:schemaRef ds:uri="6125ffc9-2c56-435e-8267-1393444907b2"/>
+    <ds:schemaRef ds:uri="http://schemas.microsoft.com/office/2006/documentManagement/types"/>
+    <ds:schemaRef ds:uri="http://schemas.microsoft.com/office/infopath/2007/PartnerControls"/>
+    <ds:schemaRef ds:uri="http://schemas.openxmlformats.org/package/2006/metadata/core-properties"/>
+    <ds:schemaRef ds:uri="http://purl.org/dc/elements/1.1/"/>
+    <ds:schemaRef ds:uri="http://purl.org/dc/terms/"/>
+    <ds:schemaRef ds:uri="http://schemas.microsoft.com/internal/obd"/>
+  </ds:schemaRefs>
+</ds:datastoreItem>
 </file>
 
 <file path=customXml/itemProps3.xml><?xml version="1.0" encoding="utf-8"?>
-<ds:datastoreItem xmlns:ds="http://schemas.openxmlformats.org/officeDocument/2006/customXml" ds:itemID="{19099616-71A7-467A-858B-5523DBE24EF4}"/>
+<ds:datastoreItem xmlns:ds="http://schemas.openxmlformats.org/officeDocument/2006/customXml" ds:itemID="{19099616-71A7-467A-858B-5523DBE24EF4}">
+  <ds:schemaRefs>
+    <ds:schemaRef ds:uri="http://schemas.microsoft.com/office/2006/metadata/properties"/>
+    <ds:schemaRef ds:uri="http://schemas.microsoft.com/office/infopath/2007/PartnerControls"/>
+  </ds:schemaRefs>
+</ds:datastoreItem>
 </file>